--- a/Prototype.pptx
+++ b/Prototype.pptx
@@ -7,12 +7,14 @@
   <p:sldIdLst>
     <p:sldId id="256" r:id="rId2"/>
     <p:sldId id="261" r:id="rId3"/>
-    <p:sldId id="257" r:id="rId4"/>
-    <p:sldId id="258" r:id="rId5"/>
-    <p:sldId id="262" r:id="rId6"/>
-    <p:sldId id="259" r:id="rId7"/>
-    <p:sldId id="260" r:id="rId8"/>
-    <p:sldId id="263" r:id="rId9"/>
+    <p:sldId id="264" r:id="rId4"/>
+    <p:sldId id="265" r:id="rId5"/>
+    <p:sldId id="257" r:id="rId6"/>
+    <p:sldId id="258" r:id="rId7"/>
+    <p:sldId id="262" r:id="rId8"/>
+    <p:sldId id="259" r:id="rId9"/>
+    <p:sldId id="260" r:id="rId10"/>
+    <p:sldId id="263" r:id="rId11"/>
   </p:sldIdLst>
   <p:sldSz cx="12192000" cy="6858000"/>
   <p:notesSz cx="6858000" cy="9144000"/>
@@ -3484,6 +3486,100 @@
 </p:sld>
 </file>
 
+<file path=ppt/slides/slide10.xml><?xml version="1.0" encoding="utf-8"?>
+<p:sld xmlns:a="http://schemas.openxmlformats.org/drawingml/2006/main" xmlns:r="http://schemas.openxmlformats.org/officeDocument/2006/relationships" xmlns:p="http://schemas.openxmlformats.org/presentationml/2006/main">
+  <p:cSld>
+    <p:spTree>
+      <p:nvGrpSpPr>
+        <p:cNvPr id="1" name=""/>
+        <p:cNvGrpSpPr/>
+        <p:nvPr/>
+      </p:nvGrpSpPr>
+      <p:grpSpPr>
+        <a:xfrm>
+          <a:off x="0" y="0"/>
+          <a:ext cx="0" cy="0"/>
+          <a:chOff x="0" y="0"/>
+          <a:chExt cx="0" cy="0"/>
+        </a:xfrm>
+      </p:grpSpPr>
+      <p:sp>
+        <p:nvSpPr>
+          <p:cNvPr id="2" name="Заголовок 1">
+            <a:extLst>
+              <a:ext uri="{FF2B5EF4-FFF2-40B4-BE49-F238E27FC236}">
+                <a16:creationId xmlns:a16="http://schemas.microsoft.com/office/drawing/2014/main" id="{96644040-D79A-9CD9-C19E-F6B5A5289423}"/>
+              </a:ext>
+            </a:extLst>
+          </p:cNvPr>
+          <p:cNvSpPr>
+            <a:spLocks noGrp="1"/>
+          </p:cNvSpPr>
+          <p:nvPr>
+            <p:ph type="title"/>
+          </p:nvPr>
+        </p:nvSpPr>
+        <p:spPr/>
+        <p:txBody>
+          <a:bodyPr/>
+          <a:lstStyle/>
+          <a:p>
+            <a:endParaRPr lang="en-US"/>
+          </a:p>
+        </p:txBody>
+      </p:sp>
+      <p:sp>
+        <p:nvSpPr>
+          <p:cNvPr id="3" name="Объект 2">
+            <a:extLst>
+              <a:ext uri="{FF2B5EF4-FFF2-40B4-BE49-F238E27FC236}">
+                <a16:creationId xmlns:a16="http://schemas.microsoft.com/office/drawing/2014/main" id="{1A4065EA-0351-C927-8FA4-EB4C005140B5}"/>
+              </a:ext>
+            </a:extLst>
+          </p:cNvPr>
+          <p:cNvSpPr>
+            <a:spLocks noGrp="1"/>
+          </p:cNvSpPr>
+          <p:nvPr>
+            <p:ph idx="1"/>
+          </p:nvPr>
+        </p:nvSpPr>
+        <p:spPr>
+          <a:xfrm>
+            <a:off x="838200" y="2956561"/>
+            <a:ext cx="10515600" cy="3220402"/>
+          </a:xfrm>
+        </p:spPr>
+        <p:txBody>
+          <a:bodyPr>
+            <a:normAutofit/>
+          </a:bodyPr>
+          <a:lstStyle/>
+          <a:p>
+            <a:pPr marL="0" indent="0" algn="ctr">
+              <a:buNone/>
+            </a:pPr>
+            <a:r>
+              <a:rPr lang="ru-RU" sz="6000" dirty="0"/>
+              <a:t>Спасибо за внимание</a:t>
+            </a:r>
+            <a:endParaRPr lang="en-US" sz="6000" dirty="0"/>
+          </a:p>
+        </p:txBody>
+      </p:sp>
+    </p:spTree>
+    <p:extLst>
+      <p:ext uri="{BB962C8B-B14F-4D97-AF65-F5344CB8AC3E}">
+        <p14:creationId xmlns:p14="http://schemas.microsoft.com/office/powerpoint/2010/main" val="1545995147"/>
+      </p:ext>
+    </p:extLst>
+  </p:cSld>
+  <p:clrMapOvr>
+    <a:masterClrMapping/>
+  </p:clrMapOvr>
+</p:sld>
+</file>
+
 <file path=ppt/slides/slide2.xml><?xml version="1.0" encoding="utf-8"?>
 <p:sld xmlns:a="http://schemas.openxmlformats.org/drawingml/2006/main" xmlns:r="http://schemas.openxmlformats.org/officeDocument/2006/relationships" xmlns:p="http://schemas.openxmlformats.org/presentationml/2006/main">
   <p:cSld>
@@ -3656,7 +3752,7 @@
           <p:cNvPr id="2" name="Заголовок 1">
             <a:extLst>
               <a:ext uri="{FF2B5EF4-FFF2-40B4-BE49-F238E27FC236}">
-                <a16:creationId xmlns:a16="http://schemas.microsoft.com/office/drawing/2014/main" id="{D76DA71F-C221-F529-009F-BD76E3CA500E}"/>
+                <a16:creationId xmlns:a16="http://schemas.microsoft.com/office/drawing/2014/main" id="{35FA540A-E00D-83DD-6EF2-B237F8040F46}"/>
               </a:ext>
             </a:extLst>
           </p:cNvPr>
@@ -3674,75 +3770,49 @@
           <a:p>
             <a:pPr algn="ctr"/>
             <a:r>
-              <a:rPr lang="ru-RU" b="1" dirty="0"/>
-              <a:t>Достоинства</a:t>
-            </a:r>
-            <a:endParaRPr lang="en-US" b="1" dirty="0"/>
-          </a:p>
-        </p:txBody>
-      </p:sp>
-      <p:sp>
-        <p:nvSpPr>
-          <p:cNvPr id="3" name="Объект 2">
-            <a:extLst>
-              <a:ext uri="{FF2B5EF4-FFF2-40B4-BE49-F238E27FC236}">
-                <a16:creationId xmlns:a16="http://schemas.microsoft.com/office/drawing/2014/main" id="{39FD63C6-AF93-5743-19F0-486F8A7C6BB0}"/>
-              </a:ext>
-            </a:extLst>
-          </p:cNvPr>
-          <p:cNvSpPr>
-            <a:spLocks noGrp="1"/>
-          </p:cNvSpPr>
+              <a:rPr lang="ru-RU" dirty="0"/>
+              <a:t>Проблема</a:t>
+            </a:r>
+            <a:endParaRPr lang="en-US" dirty="0"/>
+          </a:p>
+        </p:txBody>
+      </p:sp>
+      <p:pic>
+        <p:nvPicPr>
+          <p:cNvPr id="5" name="Объект 4">
+            <a:extLst>
+              <a:ext uri="{FF2B5EF4-FFF2-40B4-BE49-F238E27FC236}">
+                <a16:creationId xmlns:a16="http://schemas.microsoft.com/office/drawing/2014/main" id="{921904B3-9EA1-3575-6B9F-D7EA71A4AE04}"/>
+              </a:ext>
+            </a:extLst>
+          </p:cNvPr>
+          <p:cNvPicPr>
+            <a:picLocks noGrp="1" noChangeAspect="1"/>
+          </p:cNvPicPr>
           <p:nvPr>
             <p:ph idx="1"/>
           </p:nvPr>
-        </p:nvSpPr>
-        <p:spPr/>
-        <p:txBody>
-          <a:bodyPr/>
-          <a:lstStyle/>
-          <a:p>
-            <a:r>
-              <a:rPr lang="ru-RU" b="1" dirty="0"/>
-              <a:t>Простота инициализации объекта</a:t>
-            </a:r>
-          </a:p>
-          <a:p>
-            <a:r>
-              <a:rPr lang="ru-RU" b="1" dirty="0"/>
-              <a:t>Возможность клонировать объекты с их данными</a:t>
-            </a:r>
-          </a:p>
-          <a:p>
-            <a:r>
-              <a:rPr lang="ru-RU" b="1" dirty="0"/>
-              <a:t>Простота создания большого количества объектов</a:t>
-            </a:r>
-          </a:p>
-          <a:p>
-            <a:r>
-              <a:rPr lang="ru-RU" b="1" dirty="0"/>
-              <a:t>Возможность добавления новых типов в </a:t>
-            </a:r>
-            <a:r>
-              <a:rPr lang="ru-RU" b="1" dirty="0" err="1"/>
-              <a:t>рантайме</a:t>
-            </a:r>
-            <a:endParaRPr lang="ru-RU" b="1" dirty="0"/>
-          </a:p>
-          <a:p>
-            <a:r>
-              <a:rPr lang="ru-RU" b="1" dirty="0"/>
-              <a:t>Сокращение количества подклассов</a:t>
-            </a:r>
-            <a:endParaRPr lang="en-US" b="1" dirty="0"/>
-          </a:p>
-        </p:txBody>
-      </p:sp>
+        </p:nvPicPr>
+        <p:blipFill>
+          <a:blip r:embed="rId2"/>
+          <a:stretch>
+            <a:fillRect/>
+          </a:stretch>
+        </p:blipFill>
+        <p:spPr>
+          <a:xfrm>
+            <a:off x="2500640" y="1402886"/>
+            <a:ext cx="7190719" cy="4611834"/>
+          </a:xfrm>
+          <a:prstGeom prst="rect">
+            <a:avLst/>
+          </a:prstGeom>
+        </p:spPr>
+      </p:pic>
     </p:spTree>
     <p:extLst>
       <p:ext uri="{BB962C8B-B14F-4D97-AF65-F5344CB8AC3E}">
-        <p14:creationId xmlns:p14="http://schemas.microsoft.com/office/powerpoint/2010/main" val="687045407"/>
+        <p14:creationId xmlns:p14="http://schemas.microsoft.com/office/powerpoint/2010/main" val="2116034211"/>
       </p:ext>
     </p:extLst>
   </p:cSld>
@@ -3782,7 +3852,7 @@
           <p:cNvPr id="2" name="Заголовок 1">
             <a:extLst>
               <a:ext uri="{FF2B5EF4-FFF2-40B4-BE49-F238E27FC236}">
-                <a16:creationId xmlns:a16="http://schemas.microsoft.com/office/drawing/2014/main" id="{ACEA699D-24BA-F623-BFC5-6EC1E8BA3E23}"/>
+                <a16:creationId xmlns:a16="http://schemas.microsoft.com/office/drawing/2014/main" id="{B2109947-43D9-5FAE-BF77-4F67F43AB582}"/>
               </a:ext>
             </a:extLst>
           </p:cNvPr>
@@ -3800,57 +3870,49 @@
           <a:p>
             <a:pPr algn="ctr"/>
             <a:r>
-              <a:rPr lang="ru-RU" b="1" dirty="0"/>
-              <a:t>Недостатки</a:t>
-            </a:r>
-            <a:endParaRPr lang="en-US" b="1" dirty="0"/>
-          </a:p>
-        </p:txBody>
-      </p:sp>
-      <p:sp>
-        <p:nvSpPr>
-          <p:cNvPr id="3" name="Объект 2">
-            <a:extLst>
-              <a:ext uri="{FF2B5EF4-FFF2-40B4-BE49-F238E27FC236}">
-                <a16:creationId xmlns:a16="http://schemas.microsoft.com/office/drawing/2014/main" id="{3F032989-EAF7-868D-6231-E3792089D96B}"/>
-              </a:ext>
-            </a:extLst>
-          </p:cNvPr>
-          <p:cNvSpPr>
-            <a:spLocks noGrp="1"/>
-          </p:cNvSpPr>
+              <a:rPr lang="ru-RU" dirty="0"/>
+              <a:t>Решение</a:t>
+            </a:r>
+            <a:endParaRPr lang="en-US" dirty="0"/>
+          </a:p>
+        </p:txBody>
+      </p:sp>
+      <p:pic>
+        <p:nvPicPr>
+          <p:cNvPr id="5" name="Объект 4">
+            <a:extLst>
+              <a:ext uri="{FF2B5EF4-FFF2-40B4-BE49-F238E27FC236}">
+                <a16:creationId xmlns:a16="http://schemas.microsoft.com/office/drawing/2014/main" id="{01153A63-BEBF-1B9F-2918-92ABF03D4053}"/>
+              </a:ext>
+            </a:extLst>
+          </p:cNvPr>
+          <p:cNvPicPr>
+            <a:picLocks noGrp="1" noChangeAspect="1"/>
+          </p:cNvPicPr>
           <p:nvPr>
             <p:ph idx="1"/>
           </p:nvPr>
-        </p:nvSpPr>
-        <p:spPr/>
-        <p:txBody>
-          <a:bodyPr/>
-          <a:lstStyle/>
-          <a:p>
-            <a:r>
-              <a:rPr lang="ru-RU" b="1" dirty="0"/>
-              <a:t>Проблема с циклическими ссылками</a:t>
-            </a:r>
-          </a:p>
-          <a:p>
-            <a:r>
-              <a:rPr lang="ru-RU" b="1" dirty="0"/>
-              <a:t>Трудность отлаживания</a:t>
-            </a:r>
-          </a:p>
-          <a:p>
-            <a:r>
-              <a:rPr lang="ru-RU" b="1" dirty="0"/>
-              <a:t>Глубокое клонирование</a:t>
-            </a:r>
-          </a:p>
-        </p:txBody>
-      </p:sp>
+        </p:nvPicPr>
+        <p:blipFill>
+          <a:blip r:embed="rId2"/>
+          <a:stretch>
+            <a:fillRect/>
+          </a:stretch>
+        </p:blipFill>
+        <p:spPr>
+          <a:xfrm>
+            <a:off x="2421153" y="1690688"/>
+            <a:ext cx="7349694" cy="4860089"/>
+          </a:xfrm>
+          <a:prstGeom prst="rect">
+            <a:avLst/>
+          </a:prstGeom>
+        </p:spPr>
+      </p:pic>
     </p:spTree>
     <p:extLst>
       <p:ext uri="{BB962C8B-B14F-4D97-AF65-F5344CB8AC3E}">
-        <p14:creationId xmlns:p14="http://schemas.microsoft.com/office/powerpoint/2010/main" val="3619856341"/>
+        <p14:creationId xmlns:p14="http://schemas.microsoft.com/office/powerpoint/2010/main" val="1369409271"/>
       </p:ext>
     </p:extLst>
   </p:cSld>
@@ -3890,7 +3952,7 @@
           <p:cNvPr id="2" name="Заголовок 1">
             <a:extLst>
               <a:ext uri="{FF2B5EF4-FFF2-40B4-BE49-F238E27FC236}">
-                <a16:creationId xmlns:a16="http://schemas.microsoft.com/office/drawing/2014/main" id="{B99CE055-FE1D-6BE5-F01A-8F0B511A6CB6}"/>
+                <a16:creationId xmlns:a16="http://schemas.microsoft.com/office/drawing/2014/main" id="{D76DA71F-C221-F529-009F-BD76E3CA500E}"/>
               </a:ext>
             </a:extLst>
           </p:cNvPr>
@@ -3906,11 +3968,12 @@
           <a:bodyPr/>
           <a:lstStyle/>
           <a:p>
-            <a:r>
-              <a:rPr lang="ru-RU" dirty="0"/>
-              <a:t>Когда использовать</a:t>
-            </a:r>
-            <a:endParaRPr lang="en-US" dirty="0"/>
+            <a:pPr algn="ctr"/>
+            <a:r>
+              <a:rPr lang="ru-RU" b="1" dirty="0"/>
+              <a:t>Достоинства</a:t>
+            </a:r>
+            <a:endParaRPr lang="en-US" b="1" dirty="0"/>
           </a:p>
         </p:txBody>
       </p:sp>
@@ -3919,7 +3982,7 @@
           <p:cNvPr id="3" name="Объект 2">
             <a:extLst>
               <a:ext uri="{FF2B5EF4-FFF2-40B4-BE49-F238E27FC236}">
-                <a16:creationId xmlns:a16="http://schemas.microsoft.com/office/drawing/2014/main" id="{BD49CE46-8B9D-A98C-5B51-C296CA29B5A9}"/>
+                <a16:creationId xmlns:a16="http://schemas.microsoft.com/office/drawing/2014/main" id="{39FD63C6-AF93-5743-19F0-486F8A7C6BB0}"/>
               </a:ext>
             </a:extLst>
           </p:cNvPr>
@@ -3936,54 +3999,46 @@
           <a:lstStyle/>
           <a:p>
             <a:r>
-              <a:rPr lang="ru-RU" dirty="0"/>
-              <a:t>Создание объекта дороже копирования (БД, API, тяжёлые расчёты)</a:t>
-            </a:r>
-          </a:p>
-          <a:p>
-            <a:r>
-              <a:rPr lang="ru-RU" dirty="0"/>
-              <a:t>Конструктор слишком сложный (много параметров)</a:t>
-            </a:r>
-          </a:p>
-          <a:p>
-            <a:r>
-              <a:rPr lang="ru-RU" dirty="0"/>
-              <a:t>Нужно много похожих объектов с небольшими отличиями</a:t>
-            </a:r>
-          </a:p>
-          <a:p>
-            <a:r>
-              <a:rPr lang="ru-RU" dirty="0"/>
-              <a:t>Классы неизвестны до выполнения (определяются в </a:t>
-            </a:r>
-            <a:r>
-              <a:rPr lang="ru-RU" dirty="0" err="1"/>
+              <a:rPr lang="ru-RU" b="1" dirty="0"/>
+              <a:t>Простота инициализации объекта</a:t>
+            </a:r>
+          </a:p>
+          <a:p>
+            <a:r>
+              <a:rPr lang="ru-RU" b="1" dirty="0"/>
+              <a:t>Возможность клонировать объекты с их данными</a:t>
+            </a:r>
+          </a:p>
+          <a:p>
+            <a:r>
+              <a:rPr lang="ru-RU" b="1" dirty="0"/>
+              <a:t>Простота создания большого количества объектов</a:t>
+            </a:r>
+          </a:p>
+          <a:p>
+            <a:r>
+              <a:rPr lang="ru-RU" b="1" dirty="0"/>
+              <a:t>Возможность добавления новых типов в </a:t>
+            </a:r>
+            <a:r>
+              <a:rPr lang="ru-RU" b="1" dirty="0" err="1"/>
               <a:t>рантайме</a:t>
             </a:r>
-            <a:r>
-              <a:rPr lang="ru-RU" dirty="0"/>
-              <a:t>)</a:t>
-            </a:r>
-          </a:p>
-          <a:p>
-            <a:r>
-              <a:rPr lang="ru-RU" dirty="0"/>
-              <a:t>Нужно скрыть иерархию классов от клиента</a:t>
-            </a:r>
-          </a:p>
-          <a:p>
-            <a:r>
-              <a:rPr lang="ru-RU" dirty="0"/>
-              <a:t>Сложные композитные структуры (деревья объектов)</a:t>
-            </a:r>
+            <a:endParaRPr lang="ru-RU" b="1" dirty="0"/>
+          </a:p>
+          <a:p>
+            <a:r>
+              <a:rPr lang="ru-RU" b="1" dirty="0"/>
+              <a:t>Сокращение количества подклассов</a:t>
+            </a:r>
+            <a:endParaRPr lang="en-US" b="1" dirty="0"/>
           </a:p>
         </p:txBody>
       </p:sp>
     </p:spTree>
     <p:extLst>
       <p:ext uri="{BB962C8B-B14F-4D97-AF65-F5344CB8AC3E}">
-        <p14:creationId xmlns:p14="http://schemas.microsoft.com/office/powerpoint/2010/main" val="3385076960"/>
+        <p14:creationId xmlns:p14="http://schemas.microsoft.com/office/powerpoint/2010/main" val="687045407"/>
       </p:ext>
     </p:extLst>
   </p:cSld>
@@ -4023,7 +4078,7 @@
           <p:cNvPr id="2" name="Заголовок 1">
             <a:extLst>
               <a:ext uri="{FF2B5EF4-FFF2-40B4-BE49-F238E27FC236}">
-                <a16:creationId xmlns:a16="http://schemas.microsoft.com/office/drawing/2014/main" id="{5D8ACA78-4D68-CAAE-EBAF-10F5EDA55598}"/>
+                <a16:creationId xmlns:a16="http://schemas.microsoft.com/office/drawing/2014/main" id="{ACEA699D-24BA-F623-BFC5-6EC1E8BA3E23}"/>
               </a:ext>
             </a:extLst>
           </p:cNvPr>
@@ -4039,50 +4094,59 @@
           <a:bodyPr/>
           <a:lstStyle/>
           <a:p>
-            <a:r>
-              <a:rPr lang="ru-RU" dirty="0"/>
-              <a:t>Создание интерфейса прототип</a:t>
-            </a:r>
-            <a:endParaRPr lang="en-US" dirty="0"/>
-          </a:p>
-        </p:txBody>
-      </p:sp>
-      <p:pic>
-        <p:nvPicPr>
-          <p:cNvPr id="5" name="Объект 4">
-            <a:extLst>
-              <a:ext uri="{FF2B5EF4-FFF2-40B4-BE49-F238E27FC236}">
-                <a16:creationId xmlns:a16="http://schemas.microsoft.com/office/drawing/2014/main" id="{063AE7B0-73CA-867E-8F18-0889421FBD27}"/>
-              </a:ext>
-            </a:extLst>
-          </p:cNvPr>
-          <p:cNvPicPr>
-            <a:picLocks noGrp="1" noChangeAspect="1"/>
-          </p:cNvPicPr>
+            <a:pPr algn="ctr"/>
+            <a:r>
+              <a:rPr lang="ru-RU" b="1" dirty="0"/>
+              <a:t>Недостатки</a:t>
+            </a:r>
+            <a:endParaRPr lang="en-US" b="1" dirty="0"/>
+          </a:p>
+        </p:txBody>
+      </p:sp>
+      <p:sp>
+        <p:nvSpPr>
+          <p:cNvPr id="3" name="Объект 2">
+            <a:extLst>
+              <a:ext uri="{FF2B5EF4-FFF2-40B4-BE49-F238E27FC236}">
+                <a16:creationId xmlns:a16="http://schemas.microsoft.com/office/drawing/2014/main" id="{3F032989-EAF7-868D-6231-E3792089D96B}"/>
+              </a:ext>
+            </a:extLst>
+          </p:cNvPr>
+          <p:cNvSpPr>
+            <a:spLocks noGrp="1"/>
+          </p:cNvSpPr>
           <p:nvPr>
             <p:ph idx="1"/>
           </p:nvPr>
-        </p:nvPicPr>
-        <p:blipFill>
-          <a:blip r:embed="rId2"/>
-          <a:stretch>
-            <a:fillRect/>
-          </a:stretch>
-        </p:blipFill>
-        <p:spPr>
-          <a:xfrm>
-            <a:off x="3324187" y="2478536"/>
-            <a:ext cx="5738599" cy="2438904"/>
-          </a:xfrm>
-          <a:prstGeom prst="rect">
-            <a:avLst/>
-          </a:prstGeom>
-        </p:spPr>
-      </p:pic>
+        </p:nvSpPr>
+        <p:spPr/>
+        <p:txBody>
+          <a:bodyPr/>
+          <a:lstStyle/>
+          <a:p>
+            <a:r>
+              <a:rPr lang="ru-RU" b="1" dirty="0"/>
+              <a:t>Проблема с циклическими ссылками</a:t>
+            </a:r>
+          </a:p>
+          <a:p>
+            <a:r>
+              <a:rPr lang="ru-RU" b="1" dirty="0"/>
+              <a:t>Трудность отлаживания</a:t>
+            </a:r>
+          </a:p>
+          <a:p>
+            <a:r>
+              <a:rPr lang="ru-RU" b="1" dirty="0"/>
+              <a:t>Глубокое клонирование</a:t>
+            </a:r>
+          </a:p>
+        </p:txBody>
+      </p:sp>
     </p:spTree>
     <p:extLst>
       <p:ext uri="{BB962C8B-B14F-4D97-AF65-F5344CB8AC3E}">
-        <p14:creationId xmlns:p14="http://schemas.microsoft.com/office/powerpoint/2010/main" val="1090448378"/>
+        <p14:creationId xmlns:p14="http://schemas.microsoft.com/office/powerpoint/2010/main" val="3619856341"/>
       </p:ext>
     </p:extLst>
   </p:cSld>
@@ -4122,6 +4186,238 @@
           <p:cNvPr id="2" name="Заголовок 1">
             <a:extLst>
               <a:ext uri="{FF2B5EF4-FFF2-40B4-BE49-F238E27FC236}">
+                <a16:creationId xmlns:a16="http://schemas.microsoft.com/office/drawing/2014/main" id="{B99CE055-FE1D-6BE5-F01A-8F0B511A6CB6}"/>
+              </a:ext>
+            </a:extLst>
+          </p:cNvPr>
+          <p:cNvSpPr>
+            <a:spLocks noGrp="1"/>
+          </p:cNvSpPr>
+          <p:nvPr>
+            <p:ph type="title"/>
+          </p:nvPr>
+        </p:nvSpPr>
+        <p:spPr/>
+        <p:txBody>
+          <a:bodyPr/>
+          <a:lstStyle/>
+          <a:p>
+            <a:r>
+              <a:rPr lang="ru-RU" dirty="0"/>
+              <a:t>Когда использовать</a:t>
+            </a:r>
+            <a:endParaRPr lang="en-US" dirty="0"/>
+          </a:p>
+        </p:txBody>
+      </p:sp>
+      <p:sp>
+        <p:nvSpPr>
+          <p:cNvPr id="3" name="Объект 2">
+            <a:extLst>
+              <a:ext uri="{FF2B5EF4-FFF2-40B4-BE49-F238E27FC236}">
+                <a16:creationId xmlns:a16="http://schemas.microsoft.com/office/drawing/2014/main" id="{BD49CE46-8B9D-A98C-5B51-C296CA29B5A9}"/>
+              </a:ext>
+            </a:extLst>
+          </p:cNvPr>
+          <p:cNvSpPr>
+            <a:spLocks noGrp="1"/>
+          </p:cNvSpPr>
+          <p:nvPr>
+            <p:ph idx="1"/>
+          </p:nvPr>
+        </p:nvSpPr>
+        <p:spPr/>
+        <p:txBody>
+          <a:bodyPr/>
+          <a:lstStyle/>
+          <a:p>
+            <a:r>
+              <a:rPr lang="ru-RU" dirty="0"/>
+              <a:t>Создание объекта дороже копирования (БД, API, тяжёлые расчёты)</a:t>
+            </a:r>
+          </a:p>
+          <a:p>
+            <a:r>
+              <a:rPr lang="ru-RU" dirty="0"/>
+              <a:t>Конструктор слишком сложный (много параметров)</a:t>
+            </a:r>
+          </a:p>
+          <a:p>
+            <a:r>
+              <a:rPr lang="ru-RU" dirty="0"/>
+              <a:t>Нужно много похожих объектов с небольшими отличиями</a:t>
+            </a:r>
+          </a:p>
+          <a:p>
+            <a:r>
+              <a:rPr lang="ru-RU" dirty="0"/>
+              <a:t>Классы неизвестны до выполнения (определяются в </a:t>
+            </a:r>
+            <a:r>
+              <a:rPr lang="ru-RU" dirty="0" err="1"/>
+              <a:t>рантайме</a:t>
+            </a:r>
+            <a:r>
+              <a:rPr lang="ru-RU" dirty="0"/>
+              <a:t>)</a:t>
+            </a:r>
+          </a:p>
+          <a:p>
+            <a:r>
+              <a:rPr lang="ru-RU" dirty="0"/>
+              <a:t>Нужно скрыть иерархию классов от клиента</a:t>
+            </a:r>
+          </a:p>
+          <a:p>
+            <a:r>
+              <a:rPr lang="ru-RU" dirty="0"/>
+              <a:t>Сложные композитные структуры (деревья объектов)</a:t>
+            </a:r>
+          </a:p>
+        </p:txBody>
+      </p:sp>
+    </p:spTree>
+    <p:extLst>
+      <p:ext uri="{BB962C8B-B14F-4D97-AF65-F5344CB8AC3E}">
+        <p14:creationId xmlns:p14="http://schemas.microsoft.com/office/powerpoint/2010/main" val="3385076960"/>
+      </p:ext>
+    </p:extLst>
+  </p:cSld>
+  <p:clrMapOvr>
+    <a:masterClrMapping/>
+  </p:clrMapOvr>
+</p:sld>
+</file>
+
+<file path=ppt/slides/slide8.xml><?xml version="1.0" encoding="utf-8"?>
+<p:sld xmlns:a="http://schemas.openxmlformats.org/drawingml/2006/main" xmlns:r="http://schemas.openxmlformats.org/officeDocument/2006/relationships" xmlns:p="http://schemas.openxmlformats.org/presentationml/2006/main">
+  <p:cSld>
+    <p:bg>
+      <p:bgPr>
+        <a:solidFill>
+          <a:schemeClr val="bg1"/>
+        </a:solidFill>
+        <a:effectLst/>
+      </p:bgPr>
+    </p:bg>
+    <p:spTree>
+      <p:nvGrpSpPr>
+        <p:cNvPr id="1" name=""/>
+        <p:cNvGrpSpPr/>
+        <p:nvPr/>
+      </p:nvGrpSpPr>
+      <p:grpSpPr>
+        <a:xfrm>
+          <a:off x="0" y="0"/>
+          <a:ext cx="0" cy="0"/>
+          <a:chOff x="0" y="0"/>
+          <a:chExt cx="0" cy="0"/>
+        </a:xfrm>
+      </p:grpSpPr>
+      <p:sp>
+        <p:nvSpPr>
+          <p:cNvPr id="2" name="Заголовок 1">
+            <a:extLst>
+              <a:ext uri="{FF2B5EF4-FFF2-40B4-BE49-F238E27FC236}">
+                <a16:creationId xmlns:a16="http://schemas.microsoft.com/office/drawing/2014/main" id="{5D8ACA78-4D68-CAAE-EBAF-10F5EDA55598}"/>
+              </a:ext>
+            </a:extLst>
+          </p:cNvPr>
+          <p:cNvSpPr>
+            <a:spLocks noGrp="1"/>
+          </p:cNvSpPr>
+          <p:nvPr>
+            <p:ph type="title"/>
+          </p:nvPr>
+        </p:nvSpPr>
+        <p:spPr/>
+        <p:txBody>
+          <a:bodyPr/>
+          <a:lstStyle/>
+          <a:p>
+            <a:r>
+              <a:rPr lang="ru-RU" dirty="0"/>
+              <a:t>Создание интерфейса прототип</a:t>
+            </a:r>
+            <a:endParaRPr lang="en-US" dirty="0"/>
+          </a:p>
+        </p:txBody>
+      </p:sp>
+      <p:pic>
+        <p:nvPicPr>
+          <p:cNvPr id="5" name="Объект 4">
+            <a:extLst>
+              <a:ext uri="{FF2B5EF4-FFF2-40B4-BE49-F238E27FC236}">
+                <a16:creationId xmlns:a16="http://schemas.microsoft.com/office/drawing/2014/main" id="{063AE7B0-73CA-867E-8F18-0889421FBD27}"/>
+              </a:ext>
+            </a:extLst>
+          </p:cNvPr>
+          <p:cNvPicPr>
+            <a:picLocks noGrp="1" noChangeAspect="1"/>
+          </p:cNvPicPr>
+          <p:nvPr>
+            <p:ph idx="1"/>
+          </p:nvPr>
+        </p:nvPicPr>
+        <p:blipFill>
+          <a:blip r:embed="rId2"/>
+          <a:stretch>
+            <a:fillRect/>
+          </a:stretch>
+        </p:blipFill>
+        <p:spPr>
+          <a:xfrm>
+            <a:off x="3324187" y="2478536"/>
+            <a:ext cx="5738599" cy="2438904"/>
+          </a:xfrm>
+          <a:prstGeom prst="rect">
+            <a:avLst/>
+          </a:prstGeom>
+        </p:spPr>
+      </p:pic>
+    </p:spTree>
+    <p:extLst>
+      <p:ext uri="{BB962C8B-B14F-4D97-AF65-F5344CB8AC3E}">
+        <p14:creationId xmlns:p14="http://schemas.microsoft.com/office/powerpoint/2010/main" val="1090448378"/>
+      </p:ext>
+    </p:extLst>
+  </p:cSld>
+  <p:clrMapOvr>
+    <a:masterClrMapping/>
+  </p:clrMapOvr>
+</p:sld>
+</file>
+
+<file path=ppt/slides/slide9.xml><?xml version="1.0" encoding="utf-8"?>
+<p:sld xmlns:a="http://schemas.openxmlformats.org/drawingml/2006/main" xmlns:r="http://schemas.openxmlformats.org/officeDocument/2006/relationships" xmlns:p="http://schemas.openxmlformats.org/presentationml/2006/main">
+  <p:cSld>
+    <p:bg>
+      <p:bgPr>
+        <a:solidFill>
+          <a:schemeClr val="bg1"/>
+        </a:solidFill>
+        <a:effectLst/>
+      </p:bgPr>
+    </p:bg>
+    <p:spTree>
+      <p:nvGrpSpPr>
+        <p:cNvPr id="1" name=""/>
+        <p:cNvGrpSpPr/>
+        <p:nvPr/>
+      </p:nvGrpSpPr>
+      <p:grpSpPr>
+        <a:xfrm>
+          <a:off x="0" y="0"/>
+          <a:ext cx="0" cy="0"/>
+          <a:chOff x="0" y="0"/>
+          <a:chExt cx="0" cy="0"/>
+        </a:xfrm>
+      </p:grpSpPr>
+      <p:sp>
+        <p:nvSpPr>
+          <p:cNvPr id="2" name="Заголовок 1">
+            <a:extLst>
+              <a:ext uri="{FF2B5EF4-FFF2-40B4-BE49-F238E27FC236}">
                 <a16:creationId xmlns:a16="http://schemas.microsoft.com/office/drawing/2014/main" id="{05317641-87D2-8860-06D6-B909F78E6094}"/>
               </a:ext>
             </a:extLst>
@@ -4212,100 +4508,6 @@
     <p:extLst>
       <p:ext uri="{BB962C8B-B14F-4D97-AF65-F5344CB8AC3E}">
         <p14:creationId xmlns:p14="http://schemas.microsoft.com/office/powerpoint/2010/main" val="2982147385"/>
-      </p:ext>
-    </p:extLst>
-  </p:cSld>
-  <p:clrMapOvr>
-    <a:masterClrMapping/>
-  </p:clrMapOvr>
-</p:sld>
-</file>
-
-<file path=ppt/slides/slide8.xml><?xml version="1.0" encoding="utf-8"?>
-<p:sld xmlns:a="http://schemas.openxmlformats.org/drawingml/2006/main" xmlns:r="http://schemas.openxmlformats.org/officeDocument/2006/relationships" xmlns:p="http://schemas.openxmlformats.org/presentationml/2006/main">
-  <p:cSld>
-    <p:spTree>
-      <p:nvGrpSpPr>
-        <p:cNvPr id="1" name=""/>
-        <p:cNvGrpSpPr/>
-        <p:nvPr/>
-      </p:nvGrpSpPr>
-      <p:grpSpPr>
-        <a:xfrm>
-          <a:off x="0" y="0"/>
-          <a:ext cx="0" cy="0"/>
-          <a:chOff x="0" y="0"/>
-          <a:chExt cx="0" cy="0"/>
-        </a:xfrm>
-      </p:grpSpPr>
-      <p:sp>
-        <p:nvSpPr>
-          <p:cNvPr id="2" name="Заголовок 1">
-            <a:extLst>
-              <a:ext uri="{FF2B5EF4-FFF2-40B4-BE49-F238E27FC236}">
-                <a16:creationId xmlns:a16="http://schemas.microsoft.com/office/drawing/2014/main" id="{96644040-D79A-9CD9-C19E-F6B5A5289423}"/>
-              </a:ext>
-            </a:extLst>
-          </p:cNvPr>
-          <p:cNvSpPr>
-            <a:spLocks noGrp="1"/>
-          </p:cNvSpPr>
-          <p:nvPr>
-            <p:ph type="title"/>
-          </p:nvPr>
-        </p:nvSpPr>
-        <p:spPr/>
-        <p:txBody>
-          <a:bodyPr/>
-          <a:lstStyle/>
-          <a:p>
-            <a:endParaRPr lang="en-US"/>
-          </a:p>
-        </p:txBody>
-      </p:sp>
-      <p:sp>
-        <p:nvSpPr>
-          <p:cNvPr id="3" name="Объект 2">
-            <a:extLst>
-              <a:ext uri="{FF2B5EF4-FFF2-40B4-BE49-F238E27FC236}">
-                <a16:creationId xmlns:a16="http://schemas.microsoft.com/office/drawing/2014/main" id="{1A4065EA-0351-C927-8FA4-EB4C005140B5}"/>
-              </a:ext>
-            </a:extLst>
-          </p:cNvPr>
-          <p:cNvSpPr>
-            <a:spLocks noGrp="1"/>
-          </p:cNvSpPr>
-          <p:nvPr>
-            <p:ph idx="1"/>
-          </p:nvPr>
-        </p:nvSpPr>
-        <p:spPr>
-          <a:xfrm>
-            <a:off x="838200" y="2956561"/>
-            <a:ext cx="10515600" cy="3220402"/>
-          </a:xfrm>
-        </p:spPr>
-        <p:txBody>
-          <a:bodyPr>
-            <a:normAutofit/>
-          </a:bodyPr>
-          <a:lstStyle/>
-          <a:p>
-            <a:pPr marL="0" indent="0" algn="ctr">
-              <a:buNone/>
-            </a:pPr>
-            <a:r>
-              <a:rPr lang="ru-RU" sz="6000" dirty="0"/>
-              <a:t>Спасибо за внимание</a:t>
-            </a:r>
-            <a:endParaRPr lang="en-US" sz="6000" dirty="0"/>
-          </a:p>
-        </p:txBody>
-      </p:sp>
-    </p:spTree>
-    <p:extLst>
-      <p:ext uri="{BB962C8B-B14F-4D97-AF65-F5344CB8AC3E}">
-        <p14:creationId xmlns:p14="http://schemas.microsoft.com/office/powerpoint/2010/main" val="1545995147"/>
       </p:ext>
     </p:extLst>
   </p:cSld>
